--- a/assets/pptx/catalog-272.pptx
+++ b/assets/pptx/catalog-272.pptx
@@ -3458,7 +3458,7 @@
                 <a:ea typeface="Ebrima"/>
                 <a:cs typeface="Ebrima"/>
               </a:rPr>
-              <a:t>እግዚአብሔር እኔ ልባርክህ (2x)</a:t>
+              <a:t>እግዚአብሔር እኔ ልባርክህ 2x</a:t>
             </a:r>
           </a:p>
           <a:p>
@@ -3494,7 +3494,7 @@
                 <a:ea typeface="Ebrima"/>
                 <a:cs typeface="Ebrima"/>
               </a:rPr>
-              <a:t>እግዚአብሔር እኔ ልባርክህ (2x)</a:t>
+              <a:t>እግዚአብሔር እኔ ልባርክህ 2x</a:t>
             </a:r>
           </a:p>
           <a:p>
@@ -3530,7 +3530,7 @@
                 <a:ea typeface="Ebrima"/>
                 <a:cs typeface="Ebrima"/>
               </a:rPr>
-              <a:t>እግዚአብሔር እኔ ልባርክህ (2x)</a:t>
+              <a:t>እግዚአብሔር እኔ ልባርክህ 2x</a:t>
             </a:r>
           </a:p>
           <a:p>
@@ -3566,7 +3566,7 @@
                 <a:ea typeface="Ebrima"/>
                 <a:cs typeface="Ebrima"/>
               </a:rPr>
-              <a:t>እግዚአብሔር እኔ ልባርክህ (2x)</a:t>
+              <a:t>እግዚአብሔር እኔ ልባርክህ 2x</a:t>
             </a:r>
           </a:p>
         </p:txBody>
@@ -3844,7 +3844,7 @@
                 <a:ea typeface="Ebrima"/>
                 <a:cs typeface="Ebrima"/>
               </a:rPr>
-              <a:t>እግዚአብሔር እኔ ልባርክህ (2x)</a:t>
+              <a:t>እግዚአብሔር እኔ ልባርክህ 2x</a:t>
             </a:r>
           </a:p>
           <a:p>
@@ -3880,7 +3880,7 @@
                 <a:ea typeface="Ebrima"/>
                 <a:cs typeface="Ebrima"/>
               </a:rPr>
-              <a:t>እግዚአብሔር እኔ ልባርክህ (2x)</a:t>
+              <a:t>እግዚአብሔር እኔ ልባርክህ 2x</a:t>
             </a:r>
           </a:p>
           <a:p>
@@ -3916,7 +3916,7 @@
                 <a:ea typeface="Ebrima"/>
                 <a:cs typeface="Ebrima"/>
               </a:rPr>
-              <a:t>እግዚአብሔር እኔ ልባርክህ (2x)</a:t>
+              <a:t>እግዚአብሔር እኔ ልባርክህ 2x</a:t>
             </a:r>
           </a:p>
           <a:p>
@@ -3952,7 +3952,7 @@
                 <a:ea typeface="Ebrima"/>
                 <a:cs typeface="Ebrima"/>
               </a:rPr>
-              <a:t>እግዚአብሔር እኔ ልባርክህ (2x)</a:t>
+              <a:t>እግዚአብሔር እኔ ልባርክህ 2x</a:t>
             </a:r>
           </a:p>
         </p:txBody>
@@ -4230,7 +4230,7 @@
                 <a:ea typeface="Ebrima"/>
                 <a:cs typeface="Ebrima"/>
               </a:rPr>
-              <a:t>እግዚአብሔር እኔ ልባርክህ (2x)</a:t>
+              <a:t>እግዚአብሔር እኔ ልባርክህ 2x</a:t>
             </a:r>
           </a:p>
           <a:p>
@@ -4266,7 +4266,7 @@
                 <a:ea typeface="Ebrima"/>
                 <a:cs typeface="Ebrima"/>
               </a:rPr>
-              <a:t>እግዚአብሔር እኔ ልባርክህ (2x)</a:t>
+              <a:t>እግዚአብሔር እኔ ልባርክህ 2x</a:t>
             </a:r>
           </a:p>
           <a:p>
@@ -4302,7 +4302,7 @@
                 <a:ea typeface="Ebrima"/>
                 <a:cs typeface="Ebrima"/>
               </a:rPr>
-              <a:t>እግዚአብሔር እኔ ልባርክህ (2x)</a:t>
+              <a:t>እግዚአብሔር እኔ ልባርክህ 2x</a:t>
             </a:r>
           </a:p>
           <a:p>
@@ -4338,7 +4338,7 @@
                 <a:ea typeface="Ebrima"/>
                 <a:cs typeface="Ebrima"/>
               </a:rPr>
-              <a:t>እግዚአብሔር እኔ ልባርክህ (2x)</a:t>
+              <a:t>እግዚአብሔር እኔ ልባርክህ 2x</a:t>
             </a:r>
           </a:p>
         </p:txBody>
